--- a/DWES-04-RepositorioRemoto-AlvaroRuizVelazquez-AdrianGarciaHeras.pptx
+++ b/DWES-04-RepositorioRemoto-AlvaroRuizVelazquez-AdrianGarciaHeras.pptx
@@ -114,6 +114,11 @@
       </a:defRPr>
     </a:lvl9pPr>
   </p:defaultTextStyle>
+  <p:extLst>
+    <p:ext uri="{EFAFB233-063F-42B5-8137-9DF3F51BA10A}">
+      <p15:sldGuideLst xmlns:p15="http://schemas.microsoft.com/office/powerpoint/2012/main"/>
+    </p:ext>
+  </p:extLst>
 </p:presentation>
 </file>
 
@@ -5400,13 +5405,13 @@
   <p:clrMapOvr>
     <a:masterClrMapping/>
   </p:clrMapOvr>
-  <mc:AlternateContent xmlns:mc="http://schemas.openxmlformats.org/markup-compatibility/2006">
-    <mc:Choice xmlns:p14="http://schemas.microsoft.com/office/powerpoint/2010/main" Requires="p14">
+  <mc:AlternateContent xmlns:mc="http://schemas.openxmlformats.org/markup-compatibility/2006" xmlns:p14="http://schemas.microsoft.com/office/powerpoint/2010/main">
+    <mc:Choice Requires="p14">
       <p:transition spd="med" p14:dur="700">
         <p:fade/>
       </p:transition>
     </mc:Choice>
-    <mc:Fallback>
+    <mc:Fallback xmlns="">
       <p:transition spd="med">
         <p:fade/>
       </p:transition>
@@ -5710,13 +5715,13 @@
   <p:clrMapOvr>
     <a:masterClrMapping/>
   </p:clrMapOvr>
-  <mc:AlternateContent xmlns:mc="http://schemas.openxmlformats.org/markup-compatibility/2006">
-    <mc:Choice xmlns:p14="http://schemas.microsoft.com/office/powerpoint/2010/main" Requires="p14">
+  <mc:AlternateContent xmlns:mc="http://schemas.openxmlformats.org/markup-compatibility/2006" xmlns:p14="http://schemas.microsoft.com/office/powerpoint/2010/main">
+    <mc:Choice Requires="p14">
       <p:transition spd="med" p14:dur="700">
         <p:fade/>
       </p:transition>
     </mc:Choice>
-    <mc:Fallback>
+    <mc:Fallback xmlns="">
       <p:transition spd="med">
         <p:fade/>
       </p:transition>
@@ -5820,13 +5825,13 @@
   <p:clrMapOvr>
     <a:masterClrMapping/>
   </p:clrMapOvr>
-  <mc:AlternateContent xmlns:mc="http://schemas.openxmlformats.org/markup-compatibility/2006">
-    <mc:Choice xmlns:p14="http://schemas.microsoft.com/office/powerpoint/2010/main" Requires="p14">
+  <mc:AlternateContent xmlns:mc="http://schemas.openxmlformats.org/markup-compatibility/2006" xmlns:p14="http://schemas.microsoft.com/office/powerpoint/2010/main">
+    <mc:Choice Requires="p14">
       <p:transition spd="med" p14:dur="700">
         <p:fade/>
       </p:transition>
     </mc:Choice>
-    <mc:Fallback>
+    <mc:Fallback xmlns="">
       <p:transition spd="med">
         <p:fade/>
       </p:transition>
@@ -6445,13 +6450,13 @@
   <p:clrMapOvr>
     <a:masterClrMapping/>
   </p:clrMapOvr>
-  <mc:AlternateContent xmlns:mc="http://schemas.openxmlformats.org/markup-compatibility/2006">
-    <mc:Choice xmlns:p14="http://schemas.microsoft.com/office/powerpoint/2010/main" Requires="p14">
+  <mc:AlternateContent xmlns:mc="http://schemas.openxmlformats.org/markup-compatibility/2006" xmlns:p14="http://schemas.microsoft.com/office/powerpoint/2010/main">
+    <mc:Choice Requires="p14">
       <p:transition spd="med" p14:dur="700">
         <p:fade/>
       </p:transition>
     </mc:Choice>
-    <mc:Fallback>
+    <mc:Fallback xmlns="">
       <p:transition spd="med">
         <p:fade/>
       </p:transition>
@@ -6720,13 +6725,13 @@
   <p:clrMapOvr>
     <a:masterClrMapping/>
   </p:clrMapOvr>
-  <mc:AlternateContent xmlns:mc="http://schemas.openxmlformats.org/markup-compatibility/2006">
-    <mc:Choice xmlns:p14="http://schemas.microsoft.com/office/powerpoint/2010/main" Requires="p14">
+  <mc:AlternateContent xmlns:mc="http://schemas.openxmlformats.org/markup-compatibility/2006" xmlns:p14="http://schemas.microsoft.com/office/powerpoint/2010/main">
+    <mc:Choice Requires="p14">
       <p:transition spd="med" p14:dur="700">
         <p:fade/>
       </p:transition>
     </mc:Choice>
-    <mc:Fallback>
+    <mc:Fallback xmlns="">
       <p:transition spd="med">
         <p:fade/>
       </p:transition>
@@ -7199,13 +7204,13 @@
   <p:clrMapOvr>
     <a:masterClrMapping/>
   </p:clrMapOvr>
-  <mc:AlternateContent xmlns:mc="http://schemas.openxmlformats.org/markup-compatibility/2006">
-    <mc:Choice xmlns:p14="http://schemas.microsoft.com/office/powerpoint/2010/main" Requires="p14">
+  <mc:AlternateContent xmlns:mc="http://schemas.openxmlformats.org/markup-compatibility/2006" xmlns:p14="http://schemas.microsoft.com/office/powerpoint/2010/main">
+    <mc:Choice Requires="p14">
       <p:transition spd="med" p14:dur="700">
         <p:fade/>
       </p:transition>
     </mc:Choice>
-    <mc:Fallback>
+    <mc:Fallback xmlns="">
       <p:transition spd="med">
         <p:fade/>
       </p:transition>
@@ -7668,13 +7673,13 @@
   <p:clrMapOvr>
     <a:masterClrMapping/>
   </p:clrMapOvr>
-  <mc:AlternateContent xmlns:mc="http://schemas.openxmlformats.org/markup-compatibility/2006">
-    <mc:Choice xmlns:p14="http://schemas.microsoft.com/office/powerpoint/2010/main" Requires="p14">
+  <mc:AlternateContent xmlns:mc="http://schemas.openxmlformats.org/markup-compatibility/2006" xmlns:p14="http://schemas.microsoft.com/office/powerpoint/2010/main">
+    <mc:Choice Requires="p14">
       <p:transition spd="med" p14:dur="700">
         <p:fade/>
       </p:transition>
     </mc:Choice>
-    <mc:Fallback>
+    <mc:Fallback xmlns="">
       <p:transition spd="med">
         <p:fade/>
       </p:transition>
@@ -7912,13 +7917,13 @@
   <p:clrMapOvr>
     <a:masterClrMapping/>
   </p:clrMapOvr>
-  <mc:AlternateContent xmlns:mc="http://schemas.openxmlformats.org/markup-compatibility/2006">
-    <mc:Choice xmlns:p14="http://schemas.microsoft.com/office/powerpoint/2010/main" Requires="p14">
+  <mc:AlternateContent xmlns:mc="http://schemas.openxmlformats.org/markup-compatibility/2006" xmlns:p14="http://schemas.microsoft.com/office/powerpoint/2010/main">
+    <mc:Choice Requires="p14">
       <p:transition spd="med" p14:dur="700">
         <p:fade/>
       </p:transition>
     </mc:Choice>
-    <mc:Fallback>
+    <mc:Fallback xmlns="">
       <p:transition spd="med">
         <p:fade/>
       </p:transition>
@@ -8197,13 +8202,13 @@
   <p:clrMapOvr>
     <a:masterClrMapping/>
   </p:clrMapOvr>
-  <mc:AlternateContent xmlns:mc="http://schemas.openxmlformats.org/markup-compatibility/2006">
-    <mc:Choice xmlns:p14="http://schemas.microsoft.com/office/powerpoint/2010/main" Requires="p14">
+  <mc:AlternateContent xmlns:mc="http://schemas.openxmlformats.org/markup-compatibility/2006" xmlns:p14="http://schemas.microsoft.com/office/powerpoint/2010/main">
+    <mc:Choice Requires="p14">
       <p:transition spd="med" p14:dur="700">
         <p:fade/>
       </p:transition>
     </mc:Choice>
-    <mc:Fallback>
+    <mc:Fallback xmlns="">
       <p:transition spd="med">
         <p:fade/>
       </p:transition>
@@ -8749,13 +8754,13 @@
   <p:clrMapOvr>
     <a:masterClrMapping/>
   </p:clrMapOvr>
-  <mc:AlternateContent xmlns:mc="http://schemas.openxmlformats.org/markup-compatibility/2006">
-    <mc:Choice xmlns:p14="http://schemas.microsoft.com/office/powerpoint/2010/main" Requires="p14">
+  <mc:AlternateContent xmlns:mc="http://schemas.openxmlformats.org/markup-compatibility/2006" xmlns:p14="http://schemas.microsoft.com/office/powerpoint/2010/main">
+    <mc:Choice Requires="p14">
       <p:transition spd="med" p14:dur="700">
         <p:fade/>
       </p:transition>
     </mc:Choice>
-    <mc:Fallback>
+    <mc:Fallback xmlns="">
       <p:transition spd="med">
         <p:fade/>
       </p:transition>
@@ -9524,13 +9529,13 @@
   <p:clrMapOvr>
     <a:masterClrMapping/>
   </p:clrMapOvr>
-  <mc:AlternateContent xmlns:mc="http://schemas.openxmlformats.org/markup-compatibility/2006">
-    <mc:Choice xmlns:p14="http://schemas.microsoft.com/office/powerpoint/2010/main" Requires="p14">
+  <mc:AlternateContent xmlns:mc="http://schemas.openxmlformats.org/markup-compatibility/2006" xmlns:p14="http://schemas.microsoft.com/office/powerpoint/2010/main">
+    <mc:Choice Requires="p14">
       <p:transition spd="med" p14:dur="700">
         <p:fade/>
       </p:transition>
     </mc:Choice>
-    <mc:Fallback>
+    <mc:Fallback xmlns="">
       <p:transition spd="med">
         <p:fade/>
       </p:transition>
